--- a/Reporte 071026.pptx
+++ b/Reporte 071026.pptx
@@ -6551,10 +6551,10 @@
       </p:sp>
       <p:pic>
         <p:nvPicPr>
-          <p:cNvPr id="4" name="Imagen 3">
+          <p:cNvPr id="5" name="Imagen 4">
             <a:extLst>
               <a:ext uri="{FF2B5EF4-FFF2-40B4-BE49-F238E27FC236}">
-                <a16:creationId xmlns:a16="http://schemas.microsoft.com/office/drawing/2014/main" id="{2D8E37B5-B9EC-9879-0CC2-10FFAB20A7C7}"/>
+                <a16:creationId xmlns:a16="http://schemas.microsoft.com/office/drawing/2014/main" id="{22FBA1CB-772D-062C-639F-6E4F26AAE121}"/>
               </a:ext>
             </a:extLst>
           </p:cNvPr>
@@ -6571,8 +6571,8 @@
         </p:blipFill>
         <p:spPr>
           <a:xfrm>
-            <a:off x="0" y="507026"/>
-            <a:ext cx="9144000" cy="4272323"/>
+            <a:off x="-6725" y="501188"/>
+            <a:ext cx="9144000" cy="4284000"/>
           </a:xfrm>
           <a:prstGeom prst="rect">
             <a:avLst/>
@@ -6657,10 +6657,10 @@
       </p:sp>
       <p:pic>
         <p:nvPicPr>
-          <p:cNvPr id="4" name="Imagen 3">
+          <p:cNvPr id="3" name="Imagen 2">
             <a:extLst>
               <a:ext uri="{FF2B5EF4-FFF2-40B4-BE49-F238E27FC236}">
-                <a16:creationId xmlns:a16="http://schemas.microsoft.com/office/drawing/2014/main" id="{91077FBF-1B40-1710-2099-EBFC58BABC33}"/>
+                <a16:creationId xmlns:a16="http://schemas.microsoft.com/office/drawing/2014/main" id="{23F7C038-F150-8D45-9C76-9DF68A51FD54}"/>
               </a:ext>
             </a:extLst>
           </p:cNvPr>
@@ -6677,8 +6677,8 @@
         </p:blipFill>
         <p:spPr>
           <a:xfrm>
-            <a:off x="0" y="1000844"/>
-            <a:ext cx="9144000" cy="3284688"/>
+            <a:off x="-6725" y="977856"/>
+            <a:ext cx="9144000" cy="3330664"/>
           </a:xfrm>
           <a:prstGeom prst="rect">
             <a:avLst/>
@@ -6763,10 +6763,10 @@
       </p:sp>
       <p:pic>
         <p:nvPicPr>
-          <p:cNvPr id="5" name="Imagen 4">
+          <p:cNvPr id="4" name="Imagen 3">
             <a:extLst>
               <a:ext uri="{FF2B5EF4-FFF2-40B4-BE49-F238E27FC236}">
-                <a16:creationId xmlns:a16="http://schemas.microsoft.com/office/drawing/2014/main" id="{B0831E63-1FA7-FE63-41D1-28CB7354BEBB}"/>
+                <a16:creationId xmlns:a16="http://schemas.microsoft.com/office/drawing/2014/main" id="{B2C26654-0903-0269-E83A-63766975CF5C}"/>
               </a:ext>
             </a:extLst>
           </p:cNvPr>
@@ -6783,8 +6783,8 @@
         </p:blipFill>
         <p:spPr>
           <a:xfrm>
-            <a:off x="0" y="911019"/>
-            <a:ext cx="9144000" cy="3464337"/>
+            <a:off x="0" y="369332"/>
+            <a:ext cx="9144000" cy="4582123"/>
           </a:xfrm>
           <a:prstGeom prst="rect">
             <a:avLst/>
@@ -6869,10 +6869,10 @@
       </p:sp>
       <p:pic>
         <p:nvPicPr>
-          <p:cNvPr id="4" name="Imagen 3">
+          <p:cNvPr id="3" name="Imagen 2">
             <a:extLst>
               <a:ext uri="{FF2B5EF4-FFF2-40B4-BE49-F238E27FC236}">
-                <a16:creationId xmlns:a16="http://schemas.microsoft.com/office/drawing/2014/main" id="{45C6D13A-79A1-EBA4-A1B6-5C8F7FAEE418}"/>
+                <a16:creationId xmlns:a16="http://schemas.microsoft.com/office/drawing/2014/main" id="{775607CF-B2CB-E7A6-19F9-B671185D6294}"/>
               </a:ext>
             </a:extLst>
           </p:cNvPr>
@@ -6889,8 +6889,8 @@
         </p:blipFill>
         <p:spPr>
           <a:xfrm>
-            <a:off x="0" y="958226"/>
-            <a:ext cx="9144000" cy="3369924"/>
+            <a:off x="0" y="961061"/>
+            <a:ext cx="9144000" cy="3364254"/>
           </a:xfrm>
           <a:prstGeom prst="rect">
             <a:avLst/>
@@ -6975,10 +6975,10 @@
       </p:sp>
       <p:pic>
         <p:nvPicPr>
-          <p:cNvPr id="4" name="Imagen 3">
+          <p:cNvPr id="3" name="Imagen 2">
             <a:extLst>
               <a:ext uri="{FF2B5EF4-FFF2-40B4-BE49-F238E27FC236}">
-                <a16:creationId xmlns:a16="http://schemas.microsoft.com/office/drawing/2014/main" id="{7EBB9478-F055-6151-F825-04298F9BD9DF}"/>
+                <a16:creationId xmlns:a16="http://schemas.microsoft.com/office/drawing/2014/main" id="{FD7B2C57-5B34-3A73-5F6E-EAB69600A01A}"/>
               </a:ext>
             </a:extLst>
           </p:cNvPr>
@@ -6995,8 +6995,8 @@
         </p:blipFill>
         <p:spPr>
           <a:xfrm>
-            <a:off x="0" y="463717"/>
-            <a:ext cx="9144000" cy="4475265"/>
+            <a:off x="-1" y="463009"/>
+            <a:ext cx="9144000" cy="4360357"/>
           </a:xfrm>
           <a:prstGeom prst="rect">
             <a:avLst/>
@@ -7199,10 +7199,10 @@
       </p:sp>
       <p:pic>
         <p:nvPicPr>
-          <p:cNvPr id="4" name="Imagen 3">
+          <p:cNvPr id="3" name="Imagen 2">
             <a:extLst>
               <a:ext uri="{FF2B5EF4-FFF2-40B4-BE49-F238E27FC236}">
-                <a16:creationId xmlns:a16="http://schemas.microsoft.com/office/drawing/2014/main" id="{B2BAE8A6-46A0-43EF-0C5D-666D7BB24B0B}"/>
+                <a16:creationId xmlns:a16="http://schemas.microsoft.com/office/drawing/2014/main" id="{9FBF71B3-4443-7E20-E0BE-0D37B688AC25}"/>
               </a:ext>
             </a:extLst>
           </p:cNvPr>
@@ -7219,8 +7219,8 @@
         </p:blipFill>
         <p:spPr>
           <a:xfrm>
-            <a:off x="3128962" y="728662"/>
-            <a:ext cx="2886075" cy="3686175"/>
+            <a:off x="-1" y="546758"/>
+            <a:ext cx="9144000" cy="4192859"/>
           </a:xfrm>
           <a:prstGeom prst="rect">
             <a:avLst/>
